--- a/PROINZ_TG10.1_Dvoranko.pptx
+++ b/PROINZ_TG10.1_Dvoranko.pptx
@@ -859,7 +859,7 @@
           <a:p>
             <a:fld id="{A57596D4-CB16-4BAD-83F6-7E8077D61F81}" type="datetimeFigureOut">
               <a:rPr lang="hr-HR" smtClean="0"/>
-              <a:t>22.1.2026.</a:t>
+              <a:t>23.1.2026.</a:t>
             </a:fld>
             <a:endParaRPr lang="hr-HR"/>
           </a:p>
@@ -3372,7 +3372,7 @@
           <a:p>
             <a:fld id="{E46E8F5E-7C26-4DBA-9CDF-6E3092DFB447}" type="datetime1">
               <a:rPr lang="hr-HR" smtClean="0"/>
-              <a:t>22.1.2026.</a:t>
+              <a:t>23.1.2026.</a:t>
             </a:fld>
             <a:endParaRPr lang="hr-HR" dirty="0"/>
           </a:p>
@@ -3991,7 +3991,7 @@
           <a:p>
             <a:fld id="{E46E8F5E-7C26-4DBA-9CDF-6E3092DFB447}" type="datetime1">
               <a:rPr lang="hr-HR" smtClean="0"/>
-              <a:t>22.1.2026.</a:t>
+              <a:t>23.1.2026.</a:t>
             </a:fld>
             <a:endParaRPr lang="hr-HR" dirty="0"/>
           </a:p>
@@ -4284,7 +4284,7 @@
           <a:p>
             <a:fld id="{E46E8F5E-7C26-4DBA-9CDF-6E3092DFB447}" type="datetime1">
               <a:rPr lang="hr-HR" smtClean="0"/>
-              <a:t>22.1.2026.</a:t>
+              <a:t>23.1.2026.</a:t>
             </a:fld>
             <a:endParaRPr lang="hr-HR" dirty="0"/>
           </a:p>
@@ -4476,7 +4476,7 @@
           <a:p>
             <a:fld id="{E46E8F5E-7C26-4DBA-9CDF-6E3092DFB447}" type="datetime1">
               <a:rPr lang="hr-HR" smtClean="0"/>
-              <a:t>22.1.2026.</a:t>
+              <a:t>23.1.2026.</a:t>
             </a:fld>
             <a:endParaRPr lang="hr-HR" dirty="0"/>
           </a:p>
@@ -4839,7 +4839,7 @@
           <a:p>
             <a:fld id="{E46E8F5E-7C26-4DBA-9CDF-6E3092DFB447}" type="datetime1">
               <a:rPr lang="hr-HR" smtClean="0"/>
-              <a:t>22.1.2026.</a:t>
+              <a:t>23.1.2026.</a:t>
             </a:fld>
             <a:endParaRPr lang="hr-HR" dirty="0"/>
           </a:p>
@@ -5807,7 +5807,7 @@
           <a:p>
             <a:fld id="{E46E8F5E-7C26-4DBA-9CDF-6E3092DFB447}" type="datetime1">
               <a:rPr lang="hr-HR" smtClean="0"/>
-              <a:t>22.1.2026.</a:t>
+              <a:t>23.1.2026.</a:t>
             </a:fld>
             <a:endParaRPr lang="hr-HR" dirty="0"/>
           </a:p>
@@ -7787,7 +7787,7 @@
           <a:p>
             <a:fld id="{E46E8F5E-7C26-4DBA-9CDF-6E3092DFB447}" type="datetime1">
               <a:rPr lang="hr-HR" smtClean="0"/>
-              <a:t>22.1.2026.</a:t>
+              <a:t>23.1.2026.</a:t>
             </a:fld>
             <a:endParaRPr lang="hr-HR" dirty="0"/>
           </a:p>
@@ -10176,7 +10176,7 @@
           <a:p>
             <a:fld id="{E46E8F5E-7C26-4DBA-9CDF-6E3092DFB447}" type="datetime1">
               <a:rPr lang="hr-HR" smtClean="0"/>
-              <a:t>22.1.2026.</a:t>
+              <a:t>23.1.2026.</a:t>
             </a:fld>
             <a:endParaRPr lang="hr-HR" dirty="0"/>
           </a:p>
@@ -10521,7 +10521,7 @@
           <a:p>
             <a:fld id="{E46E8F5E-7C26-4DBA-9CDF-6E3092DFB447}" type="datetime1">
               <a:rPr lang="hr-HR" smtClean="0"/>
-              <a:t>22.1.2026.</a:t>
+              <a:t>23.1.2026.</a:t>
             </a:fld>
             <a:endParaRPr lang="hr-HR" dirty="0"/>
           </a:p>
@@ -10978,7 +10978,7 @@
           <a:p>
             <a:fld id="{E46E8F5E-7C26-4DBA-9CDF-6E3092DFB447}" type="datetime1">
               <a:rPr lang="hr-HR" smtClean="0"/>
-              <a:t>22.1.2026.</a:t>
+              <a:t>23.1.2026.</a:t>
             </a:fld>
             <a:endParaRPr lang="hr-HR" dirty="0"/>
           </a:p>
@@ -11606,7 +11606,7 @@
           <a:p>
             <a:fld id="{E46E8F5E-7C26-4DBA-9CDF-6E3092DFB447}" type="datetime1">
               <a:rPr lang="hr-HR" smtClean="0"/>
-              <a:t>22.1.2026.</a:t>
+              <a:t>23.1.2026.</a:t>
             </a:fld>
             <a:endParaRPr lang="hr-HR" dirty="0"/>
           </a:p>
@@ -12602,6 +12602,13 @@
             <a:schemeClr val="lt1"/>
           </a:fontRef>
         </p:style>
+        <p:txBody>
+          <a:bodyPr/>
+          <a:lstStyle/>
+          <a:p>
+            <a:endParaRPr lang="en-GB"/>
+          </a:p>
+        </p:txBody>
       </p:sp>
       <p:sp>
         <p:nvSpPr>
@@ -12656,6 +12663,13 @@
             <a:schemeClr val="lt1"/>
           </a:fontRef>
         </p:style>
+        <p:txBody>
+          <a:bodyPr/>
+          <a:lstStyle/>
+          <a:p>
+            <a:endParaRPr lang="en-GB"/>
+          </a:p>
+        </p:txBody>
       </p:sp>
       <p:sp>
         <p:nvSpPr>
@@ -12710,6 +12724,13 @@
             <a:schemeClr val="lt1"/>
           </a:fontRef>
         </p:style>
+        <p:txBody>
+          <a:bodyPr/>
+          <a:lstStyle/>
+          <a:p>
+            <a:endParaRPr lang="en-GB"/>
+          </a:p>
+        </p:txBody>
       </p:sp>
       <p:pic>
         <p:nvPicPr>
@@ -12971,6 +12992,13 @@
             <a:schemeClr val="lt1"/>
           </a:fontRef>
         </p:style>
+        <p:txBody>
+          <a:bodyPr/>
+          <a:lstStyle/>
+          <a:p>
+            <a:endParaRPr lang="en-GB"/>
+          </a:p>
+        </p:txBody>
       </p:sp>
       <p:sp>
         <p:nvSpPr>
@@ -13025,6 +13053,13 @@
             <a:schemeClr val="lt1"/>
           </a:fontRef>
         </p:style>
+        <p:txBody>
+          <a:bodyPr/>
+          <a:lstStyle/>
+          <a:p>
+            <a:endParaRPr lang="en-GB"/>
+          </a:p>
+        </p:txBody>
       </p:sp>
       <p:sp>
         <p:nvSpPr>
@@ -13909,6 +13944,13 @@
             <a:schemeClr val="lt1"/>
           </a:fontRef>
         </p:style>
+        <p:txBody>
+          <a:bodyPr/>
+          <a:lstStyle/>
+          <a:p>
+            <a:endParaRPr lang="en-GB"/>
+          </a:p>
+        </p:txBody>
       </p:sp>
       <p:sp>
         <p:nvSpPr>
@@ -13963,6 +14005,13 @@
             <a:schemeClr val="lt1"/>
           </a:fontRef>
         </p:style>
+        <p:txBody>
+          <a:bodyPr/>
+          <a:lstStyle/>
+          <a:p>
+            <a:endParaRPr lang="en-GB"/>
+          </a:p>
+        </p:txBody>
       </p:sp>
       <p:sp>
         <p:nvSpPr>
@@ -14425,6 +14474,13 @@
             <a:schemeClr val="lt1"/>
           </a:fontRef>
         </p:style>
+        <p:txBody>
+          <a:bodyPr/>
+          <a:lstStyle/>
+          <a:p>
+            <a:endParaRPr lang="en-GB"/>
+          </a:p>
+        </p:txBody>
       </p:sp>
       <p:sp>
         <p:nvSpPr>
@@ -14479,6 +14535,13 @@
             <a:schemeClr val="lt1"/>
           </a:fontRef>
         </p:style>
+        <p:txBody>
+          <a:bodyPr/>
+          <a:lstStyle/>
+          <a:p>
+            <a:endParaRPr lang="en-GB"/>
+          </a:p>
+        </p:txBody>
       </p:sp>
       <p:sp>
         <p:nvSpPr>
@@ -14784,6 +14847,13 @@
             <a:schemeClr val="lt1"/>
           </a:fontRef>
         </p:style>
+        <p:txBody>
+          <a:bodyPr/>
+          <a:lstStyle/>
+          <a:p>
+            <a:endParaRPr lang="en-GB"/>
+          </a:p>
+        </p:txBody>
       </p:sp>
       <p:sp>
         <p:nvSpPr>
@@ -14838,6 +14908,13 @@
             <a:schemeClr val="lt1"/>
           </a:fontRef>
         </p:style>
+        <p:txBody>
+          <a:bodyPr/>
+          <a:lstStyle/>
+          <a:p>
+            <a:endParaRPr lang="en-GB"/>
+          </a:p>
+        </p:txBody>
       </p:sp>
       <p:sp>
         <p:nvSpPr>
@@ -14892,6 +14969,13 @@
             <a:schemeClr val="lt1"/>
           </a:fontRef>
         </p:style>
+        <p:txBody>
+          <a:bodyPr/>
+          <a:lstStyle/>
+          <a:p>
+            <a:endParaRPr lang="en-GB"/>
+          </a:p>
+        </p:txBody>
       </p:sp>
       <p:sp>
         <p:nvSpPr>
@@ -14946,6 +15030,13 @@
             <a:schemeClr val="lt1"/>
           </a:fontRef>
         </p:style>
+        <p:txBody>
+          <a:bodyPr/>
+          <a:lstStyle/>
+          <a:p>
+            <a:endParaRPr lang="en-GB"/>
+          </a:p>
+        </p:txBody>
       </p:sp>
       <p:sp>
         <p:nvSpPr>
@@ -15326,6 +15417,13 @@
             <a:schemeClr val="lt1"/>
           </a:fontRef>
         </p:style>
+        <p:txBody>
+          <a:bodyPr/>
+          <a:lstStyle/>
+          <a:p>
+            <a:endParaRPr lang="en-GB"/>
+          </a:p>
+        </p:txBody>
       </p:sp>
       <p:sp>
         <p:nvSpPr>
@@ -15981,6 +16079,13 @@
             <a:schemeClr val="lt1"/>
           </a:fontRef>
         </p:style>
+        <p:txBody>
+          <a:bodyPr/>
+          <a:lstStyle/>
+          <a:p>
+            <a:endParaRPr lang="en-GB"/>
+          </a:p>
+        </p:txBody>
       </p:sp>
       <p:sp>
         <p:nvSpPr>
@@ -16035,6 +16140,13 @@
             <a:schemeClr val="lt1"/>
           </a:fontRef>
         </p:style>
+        <p:txBody>
+          <a:bodyPr/>
+          <a:lstStyle/>
+          <a:p>
+            <a:endParaRPr lang="en-GB"/>
+          </a:p>
+        </p:txBody>
       </p:sp>
       <p:sp>
         <p:nvSpPr>
@@ -16089,6 +16201,13 @@
             <a:schemeClr val="lt1"/>
           </a:fontRef>
         </p:style>
+        <p:txBody>
+          <a:bodyPr/>
+          <a:lstStyle/>
+          <a:p>
+            <a:endParaRPr lang="en-GB"/>
+          </a:p>
+        </p:txBody>
       </p:sp>
       <p:sp>
         <p:nvSpPr>
@@ -16143,6 +16262,13 @@
             <a:schemeClr val="lt1"/>
           </a:fontRef>
         </p:style>
+        <p:txBody>
+          <a:bodyPr/>
+          <a:lstStyle/>
+          <a:p>
+            <a:endParaRPr lang="en-GB"/>
+          </a:p>
+        </p:txBody>
       </p:sp>
       <p:sp>
         <p:nvSpPr>
@@ -16532,6 +16658,13 @@
             <a:schemeClr val="lt1"/>
           </a:fontRef>
         </p:style>
+        <p:txBody>
+          <a:bodyPr/>
+          <a:lstStyle/>
+          <a:p>
+            <a:endParaRPr lang="en-GB"/>
+          </a:p>
+        </p:txBody>
       </p:sp>
       <p:sp>
         <p:nvSpPr>
@@ -16883,7 +17016,7 @@
           <a:lstStyle/>
           <a:p>
             <a:r>
-              <a:rPr lang="hr-HR" sz="3100">
+              <a:rPr lang="hr-HR" sz="3100" dirty="0">
                 <a:solidFill>
                   <a:schemeClr val="accent1"/>
                 </a:solidFill>
@@ -16946,6 +17079,13 @@
             <a:schemeClr val="lt1"/>
           </a:fontRef>
         </p:style>
+        <p:txBody>
+          <a:bodyPr/>
+          <a:lstStyle/>
+          <a:p>
+            <a:endParaRPr lang="en-GB"/>
+          </a:p>
+        </p:txBody>
       </p:sp>
       <p:sp>
         <p:nvSpPr>
@@ -17259,6 +17399,13 @@
             <a:schemeClr val="lt1"/>
           </a:fontRef>
         </p:style>
+        <p:txBody>
+          <a:bodyPr/>
+          <a:lstStyle/>
+          <a:p>
+            <a:endParaRPr lang="en-GB"/>
+          </a:p>
+        </p:txBody>
       </p:sp>
       <p:sp>
         <p:nvSpPr>
@@ -17313,6 +17460,13 @@
             <a:schemeClr val="lt1"/>
           </a:fontRef>
         </p:style>
+        <p:txBody>
+          <a:bodyPr/>
+          <a:lstStyle/>
+          <a:p>
+            <a:endParaRPr lang="en-GB"/>
+          </a:p>
+        </p:txBody>
       </p:sp>
       <p:sp>
         <p:nvSpPr>
@@ -17367,6 +17521,13 @@
             <a:schemeClr val="lt1"/>
           </a:fontRef>
         </p:style>
+        <p:txBody>
+          <a:bodyPr/>
+          <a:lstStyle/>
+          <a:p>
+            <a:endParaRPr lang="en-GB"/>
+          </a:p>
+        </p:txBody>
       </p:sp>
       <p:sp>
         <p:nvSpPr>
@@ -17421,6 +17582,13 @@
             <a:schemeClr val="lt1"/>
           </a:fontRef>
         </p:style>
+        <p:txBody>
+          <a:bodyPr/>
+          <a:lstStyle/>
+          <a:p>
+            <a:endParaRPr lang="en-GB"/>
+          </a:p>
+        </p:txBody>
       </p:sp>
       <p:sp useBgFill="1">
         <p:nvSpPr>
@@ -17535,6 +17703,13 @@
             <a:schemeClr val="lt1"/>
           </a:fontRef>
         </p:style>
+        <p:txBody>
+          <a:bodyPr/>
+          <a:lstStyle/>
+          <a:p>
+            <a:endParaRPr lang="en-GB"/>
+          </a:p>
+        </p:txBody>
       </p:sp>
       <p:sp>
         <p:nvSpPr>
@@ -17589,6 +17764,13 @@
             <a:schemeClr val="lt1"/>
           </a:fontRef>
         </p:style>
+        <p:txBody>
+          <a:bodyPr/>
+          <a:lstStyle/>
+          <a:p>
+            <a:endParaRPr lang="en-GB"/>
+          </a:p>
+        </p:txBody>
       </p:sp>
       <p:sp>
         <p:nvSpPr>
@@ -17643,6 +17825,13 @@
             <a:schemeClr val="lt1"/>
           </a:fontRef>
         </p:style>
+        <p:txBody>
+          <a:bodyPr/>
+          <a:lstStyle/>
+          <a:p>
+            <a:endParaRPr lang="en-GB"/>
+          </a:p>
+        </p:txBody>
       </p:sp>
       <p:sp>
         <p:nvSpPr>
@@ -17697,6 +17886,13 @@
             <a:schemeClr val="lt1"/>
           </a:fontRef>
         </p:style>
+        <p:txBody>
+          <a:bodyPr/>
+          <a:lstStyle/>
+          <a:p>
+            <a:endParaRPr lang="en-GB"/>
+          </a:p>
+        </p:txBody>
       </p:sp>
       <p:sp>
         <p:nvSpPr>
@@ -17804,10 +18000,10 @@
       </p:sp>
       <p:pic>
         <p:nvPicPr>
-          <p:cNvPr id="7" name="Rezervirano mjesto sadržaja 6">
+          <p:cNvPr id="8" name="Content Placeholder 7">
             <a:extLst>
               <a:ext uri="{FF2B5EF4-FFF2-40B4-BE49-F238E27FC236}">
-                <a16:creationId xmlns:a16="http://schemas.microsoft.com/office/drawing/2014/main" id="{E1003A37-54D3-5612-0022-CB416B0BB557}"/>
+                <a16:creationId xmlns:a16="http://schemas.microsoft.com/office/drawing/2014/main" id="{E87C5388-2F02-8BD4-A387-0AE4753F3576}"/>
               </a:ext>
             </a:extLst>
           </p:cNvPr>
@@ -17819,19 +18015,22 @@
           </p:nvPr>
         </p:nvPicPr>
         <p:blipFill>
-          <a:blip r:embed="rId2"/>
+          <a:blip r:embed="rId2">
+            <a:extLst>
+              <a:ext uri="{28A0092B-C50C-407E-A947-70E740481C1C}">
+                <a14:useLocalDpi xmlns:a14="http://schemas.microsoft.com/office/drawing/2010/main" val="0"/>
+              </a:ext>
+            </a:extLst>
+          </a:blip>
           <a:stretch>
             <a:fillRect/>
           </a:stretch>
         </p:blipFill>
         <p:spPr>
           <a:xfrm>
-            <a:off x="207263" y="804756"/>
-            <a:ext cx="5751599" cy="5400675"/>
-          </a:xfrm>
-          <a:prstGeom prst="rect">
-            <a:avLst/>
-          </a:prstGeom>
+            <a:off x="211902" y="728662"/>
+            <a:ext cx="5800976" cy="5400675"/>
+          </a:xfrm>
         </p:spPr>
       </p:pic>
     </p:spTree>
@@ -17937,6 +18136,13 @@
             <a:schemeClr val="lt1"/>
           </a:fontRef>
         </p:style>
+        <p:txBody>
+          <a:bodyPr/>
+          <a:lstStyle/>
+          <a:p>
+            <a:endParaRPr lang="en-GB"/>
+          </a:p>
+        </p:txBody>
       </p:sp>
       <p:sp>
         <p:nvSpPr>
@@ -17991,6 +18197,13 @@
             <a:schemeClr val="lt1"/>
           </a:fontRef>
         </p:style>
+        <p:txBody>
+          <a:bodyPr/>
+          <a:lstStyle/>
+          <a:p>
+            <a:endParaRPr lang="en-GB"/>
+          </a:p>
+        </p:txBody>
       </p:sp>
       <p:sp>
         <p:nvSpPr>
@@ -18045,6 +18258,13 @@
             <a:schemeClr val="lt1"/>
           </a:fontRef>
         </p:style>
+        <p:txBody>
+          <a:bodyPr/>
+          <a:lstStyle/>
+          <a:p>
+            <a:endParaRPr lang="en-GB"/>
+          </a:p>
+        </p:txBody>
       </p:sp>
       <p:sp>
         <p:nvSpPr>
@@ -18099,6 +18319,13 @@
             <a:schemeClr val="lt1"/>
           </a:fontRef>
         </p:style>
+        <p:txBody>
+          <a:bodyPr/>
+          <a:lstStyle/>
+          <a:p>
+            <a:endParaRPr lang="en-GB"/>
+          </a:p>
+        </p:txBody>
       </p:sp>
       <p:sp>
         <p:nvSpPr>
@@ -18216,6 +18443,13 @@
             <a:schemeClr val="lt1"/>
           </a:fontRef>
         </p:style>
+        <p:txBody>
+          <a:bodyPr/>
+          <a:lstStyle/>
+          <a:p>
+            <a:endParaRPr lang="en-GB"/>
+          </a:p>
+        </p:txBody>
       </p:sp>
       <p:sp>
         <p:nvSpPr>
@@ -18270,6 +18504,13 @@
             <a:schemeClr val="lt1"/>
           </a:fontRef>
         </p:style>
+        <p:txBody>
+          <a:bodyPr/>
+          <a:lstStyle/>
+          <a:p>
+            <a:endParaRPr lang="en-GB"/>
+          </a:p>
+        </p:txBody>
       </p:sp>
       <p:sp>
         <p:nvSpPr>
